--- a/dist/초3/영어/소리와문자/초3_영어_소리와문자_01_알파벳A부터M까지.pptx
+++ b/dist/초3/영어/소리와문자/초3_영어_소리와문자_01_알파벳A부터M까지.pptx
@@ -123,13 +123,13 @@
   <p:extLst>
     <p:ext uri="{521415D9-36F7-43E2-AB2F-B90AF26B5E84}">
       <p14:sectionLst xmlns:p14="http://schemas.microsoft.com/office/powerpoint/2010/main">
-        <p14:section name="도입" id="{626ea4ab-c953-147c-716a-17ca771cd0e6}">
+        <p14:section name="도입" id="{ff69ef34-8790-4b89-4d65-552af405065c}">
           <p14:sldIdLst>
             <p14:sldId id="256"/>
             <p14:sldId id="257"/>
           </p14:sldIdLst>
         </p14:section>
-        <p14:section name="개념" id="{7c966d24-c44c-ad12-f7b5-249f0e603510}">
+        <p14:section name="개념" id="{d5dfc840-f831-89c2-9a68-478b46e939e0}">
           <p14:sldIdLst>
             <p14:sldId id="258"/>
             <p14:sldId id="259"/>
@@ -140,26 +140,26 @@
             <p14:sldId id="264"/>
           </p14:sldIdLst>
         </p14:section>
-        <p14:section name="연습" id="{d24d0f2a-29f9-025a-68af-e2dcf582ba10}">
+        <p14:section name="연습" id="{407cab2d-8d79-3642-161c-caae61d15feb}">
           <p14:sldIdLst>
             <p14:sldId id="265"/>
             <p14:sldId id="266"/>
             <p14:sldId id="267"/>
           </p14:sldIdLst>
         </p14:section>
-        <p14:section name="확인" id="{9ecc385a-339f-339c-0f9b-25af960c1baf}">
+        <p14:section name="확인" id="{3bad1634-93a0-f494-f7be-dfcd048fe44f}">
           <p14:sldIdLst>
             <p14:sldId id="268"/>
             <p14:sldId id="269"/>
             <p14:sldId id="270"/>
           </p14:sldIdLst>
         </p14:section>
-        <p14:section name="정리" id="{ed022df0-c150-60dd-43b3-5ed5db22c1bd}">
+        <p14:section name="정리" id="{42baf4ca-402a-1df3-20a2-b92ecaaac8ef}">
           <p14:sldIdLst>
             <p14:sldId id="271"/>
           </p14:sldIdLst>
         </p14:section>
-        <p14:section name="보충" id="{11b7d582-3302-40c0-94a5-eab915c9c968}">
+        <p14:section name="보충" id="{b556a273-2676-2b7b-8932-062b9672b304}">
           <p14:sldIdLst>
             <p14:sldId id="272"/>
           </p14:sldIdLst>
@@ -3378,7 +3378,7 @@
               <a:buNone/>
             </a:pPr>
             <a:r>
-              <a:rPr lang="ko-KR" altLang="en-US" sz="5900" b="1" dirty="0">
+              <a:rPr lang="en-US" altLang="ko-KR" sz="5900" b="1" dirty="0">
                 <a:solidFill>
                   <a:srgbClr val="1F2937"/>
                 </a:solidFill>
@@ -3425,7 +3425,7 @@
               <a:buNone/>
             </a:pPr>
             <a:r>
-              <a:rPr lang="ko-KR" altLang="en-US" sz="5900" b="1" dirty="0">
+              <a:rPr lang="en-US" altLang="ko-KR" sz="5900" b="1" dirty="0">
                 <a:solidFill>
                   <a:srgbClr val="1F2937"/>
                 </a:solidFill>
@@ -3472,7 +3472,7 @@
               <a:buNone/>
             </a:pPr>
             <a:r>
-              <a:rPr lang="ko-KR" altLang="en-US" sz="5900" b="1" dirty="0">
+              <a:rPr lang="en-US" altLang="ko-KR" sz="5900" b="1" dirty="0">
                 <a:solidFill>
                   <a:srgbClr val="1F2937"/>
                 </a:solidFill>
@@ -3519,7 +3519,7 @@
               <a:buNone/>
             </a:pPr>
             <a:r>
-              <a:rPr lang="ko-KR" altLang="en-US" sz="5900" b="1" dirty="0">
+              <a:rPr lang="en-US" altLang="ko-KR" sz="5900" b="1" dirty="0">
                 <a:solidFill>
                   <a:srgbClr val="1F2937"/>
                 </a:solidFill>
@@ -3780,7 +3780,7 @@
               <a:buNone/>
             </a:pPr>
             <a:r>
-              <a:rPr lang="ko-KR" altLang="en-US" sz="5900" b="1" dirty="0">
+              <a:rPr lang="en-US" altLang="ko-KR" sz="5900" b="1" dirty="0">
                 <a:solidFill>
                   <a:srgbClr val="1F2937"/>
                 </a:solidFill>
@@ -3827,7 +3827,7 @@
               <a:buNone/>
             </a:pPr>
             <a:r>
-              <a:rPr lang="ko-KR" altLang="en-US" sz="5900" b="1" dirty="0">
+              <a:rPr lang="en-US" altLang="ko-KR" sz="5900" b="1" dirty="0">
                 <a:solidFill>
                   <a:srgbClr val="1F2937"/>
                 </a:solidFill>
@@ -3874,7 +3874,7 @@
               <a:buNone/>
             </a:pPr>
             <a:r>
-              <a:rPr lang="ko-KR" altLang="en-US" sz="5900" b="1" dirty="0">
+              <a:rPr lang="en-US" altLang="ko-KR" sz="5900" b="1" dirty="0">
                 <a:solidFill>
                   <a:srgbClr val="1F2937"/>
                 </a:solidFill>
@@ -3921,7 +3921,7 @@
               <a:buNone/>
             </a:pPr>
             <a:r>
-              <a:rPr lang="ko-KR" altLang="en-US" sz="5900" b="1" dirty="0">
+              <a:rPr lang="en-US" altLang="ko-KR" sz="5900" b="1" dirty="0">
                 <a:solidFill>
                   <a:srgbClr val="1F2937"/>
                 </a:solidFill>
@@ -3968,7 +3968,7 @@
               <a:buNone/>
             </a:pPr>
             <a:r>
-              <a:rPr lang="ko-KR" altLang="en-US" sz="5900" b="1" dirty="0">
+              <a:rPr lang="en-US" altLang="ko-KR" sz="5900" b="1" dirty="0">
                 <a:solidFill>
                   <a:srgbClr val="1F2937"/>
                 </a:solidFill>
@@ -4015,7 +4015,7 @@
               <a:buNone/>
             </a:pPr>
             <a:r>
-              <a:rPr lang="ko-KR" altLang="en-US" sz="5900" b="1" dirty="0">
+              <a:rPr lang="en-US" altLang="ko-KR" sz="5900" b="1" dirty="0">
                 <a:solidFill>
                   <a:srgbClr val="1F2937"/>
                 </a:solidFill>
@@ -4062,7 +4062,7 @@
               <a:buNone/>
             </a:pPr>
             <a:r>
-              <a:rPr lang="ko-KR" altLang="en-US" sz="5900" b="1" dirty="0">
+              <a:rPr lang="en-US" altLang="ko-KR" sz="5900" b="1" dirty="0">
                 <a:solidFill>
                   <a:srgbClr val="1F2937"/>
                 </a:solidFill>
@@ -4109,7 +4109,7 @@
               <a:buNone/>
             </a:pPr>
             <a:r>
-              <a:rPr lang="ko-KR" altLang="en-US" sz="5900" b="1" dirty="0">
+              <a:rPr lang="en-US" altLang="ko-KR" sz="5900" b="1" dirty="0">
                 <a:solidFill>
                   <a:srgbClr val="1F2937"/>
                 </a:solidFill>
@@ -4156,7 +4156,7 @@
               <a:buNone/>
             </a:pPr>
             <a:r>
-              <a:rPr lang="ko-KR" altLang="en-US" sz="5900" b="1" dirty="0">
+              <a:rPr lang="en-US" altLang="ko-KR" sz="5900" b="1" dirty="0">
                 <a:solidFill>
                   <a:srgbClr val="1F2937"/>
                 </a:solidFill>
@@ -4203,7 +4203,7 @@
               <a:buNone/>
             </a:pPr>
             <a:r>
-              <a:rPr lang="ko-KR" altLang="en-US" sz="5900" b="1" dirty="0">
+              <a:rPr lang="en-US" altLang="ko-KR" sz="5900" b="1" dirty="0">
                 <a:solidFill>
                   <a:srgbClr val="1F2937"/>
                 </a:solidFill>
@@ -4250,7 +4250,7 @@
               <a:buNone/>
             </a:pPr>
             <a:r>
-              <a:rPr lang="ko-KR" altLang="en-US" sz="5900" b="1" dirty="0">
+              <a:rPr lang="en-US" altLang="ko-KR" sz="5900" b="1" dirty="0">
                 <a:solidFill>
                   <a:srgbClr val="1F2937"/>
                 </a:solidFill>
@@ -4297,7 +4297,7 @@
               <a:buNone/>
             </a:pPr>
             <a:r>
-              <a:rPr lang="ko-KR" altLang="en-US" sz="5900" b="1" dirty="0">
+              <a:rPr lang="en-US" altLang="ko-KR" sz="5900" b="1" dirty="0">
                 <a:solidFill>
                   <a:srgbClr val="1F2937"/>
                 </a:solidFill>
@@ -4344,7 +4344,7 @@
               <a:buNone/>
             </a:pPr>
             <a:r>
-              <a:rPr lang="ko-KR" altLang="en-US" sz="5900" b="1" dirty="0">
+              <a:rPr lang="en-US" altLang="ko-KR" sz="5900" b="1" dirty="0">
                 <a:solidFill>
                   <a:srgbClr val="1F2937"/>
                 </a:solidFill>
@@ -4690,7 +4690,7 @@
               <a:buNone/>
             </a:pPr>
             <a:r>
-              <a:rPr lang="ko-KR" altLang="en-US" sz="5900" b="1" dirty="0">
+              <a:rPr lang="en-US" altLang="ko-KR" sz="5900" b="1" dirty="0">
                 <a:solidFill>
                   <a:srgbClr val="1F2937"/>
                 </a:solidFill>
@@ -4784,7 +4784,7 @@
               <a:buNone/>
             </a:pPr>
             <a:r>
-              <a:rPr lang="ko-KR" altLang="en-US" sz="5900" b="1" dirty="0">
+              <a:rPr lang="en-US" altLang="ko-KR" sz="5900" b="1" dirty="0">
                 <a:solidFill>
                   <a:srgbClr val="1F2937"/>
                 </a:solidFill>
@@ -5100,7 +5100,7 @@
               <a:buNone/>
             </a:pPr>
             <a:r>
-              <a:rPr lang="ko-KR" altLang="en-US" sz="4000" b="1" dirty="0">
+              <a:rPr lang="en-US" altLang="ko-KR" sz="4000" b="1" dirty="0">
                 <a:solidFill>
                   <a:srgbClr val="1F2937"/>
                 </a:solidFill>
@@ -5147,7 +5147,7 @@
               <a:buNone/>
             </a:pPr>
             <a:r>
-              <a:rPr lang="ko-KR" altLang="en-US" sz="4000" b="1" dirty="0">
+              <a:rPr lang="en-US" altLang="ko-KR" sz="4000" b="1" dirty="0">
                 <a:solidFill>
                   <a:srgbClr val="1F2937"/>
                 </a:solidFill>
@@ -5241,7 +5241,7 @@
               <a:buNone/>
             </a:pPr>
             <a:r>
-              <a:rPr lang="ko-KR" altLang="en-US" sz="4000" b="1" dirty="0">
+              <a:rPr lang="en-US" altLang="ko-KR" sz="4000" b="1" dirty="0">
                 <a:solidFill>
                   <a:srgbClr val="1F2937"/>
                 </a:solidFill>
@@ -5335,7 +5335,7 @@
               <a:buNone/>
             </a:pPr>
             <a:r>
-              <a:rPr lang="ko-KR" altLang="en-US" sz="4000" b="1" dirty="0">
+              <a:rPr lang="en-US" altLang="ko-KR" sz="4000" b="1" dirty="0">
                 <a:solidFill>
                   <a:srgbClr val="1F2937"/>
                 </a:solidFill>
@@ -5382,7 +5382,7 @@
               <a:buNone/>
             </a:pPr>
             <a:r>
-              <a:rPr lang="ko-KR" altLang="en-US" sz="4000" b="1" dirty="0">
+              <a:rPr lang="en-US" altLang="ko-KR" sz="4000" b="1" dirty="0">
                 <a:solidFill>
                   <a:srgbClr val="1F2937"/>
                 </a:solidFill>
@@ -5476,7 +5476,7 @@
               <a:buNone/>
             </a:pPr>
             <a:r>
-              <a:rPr lang="ko-KR" altLang="en-US" sz="4000" b="1" dirty="0">
+              <a:rPr lang="en-US" altLang="ko-KR" sz="4000" b="1" dirty="0">
                 <a:solidFill>
                   <a:srgbClr val="1F2937"/>
                 </a:solidFill>
@@ -5617,7 +5617,7 @@
               <a:buNone/>
             </a:pPr>
             <a:r>
-              <a:rPr lang="ko-KR" altLang="en-US" sz="4000" b="1" dirty="0">
+              <a:rPr lang="en-US" altLang="ko-KR" sz="4000" b="1" dirty="0">
                 <a:solidFill>
                   <a:srgbClr val="1F2937"/>
                 </a:solidFill>
@@ -5664,7 +5664,7 @@
               <a:buNone/>
             </a:pPr>
             <a:r>
-              <a:rPr lang="ko-KR" altLang="en-US" sz="4000" b="1" dirty="0">
+              <a:rPr lang="en-US" altLang="ko-KR" sz="4000" b="1" dirty="0">
                 <a:solidFill>
                   <a:srgbClr val="1F2937"/>
                 </a:solidFill>
@@ -5711,7 +5711,7 @@
               <a:buNone/>
             </a:pPr>
             <a:r>
-              <a:rPr lang="ko-KR" altLang="en-US" sz="4000" b="1" dirty="0">
+              <a:rPr lang="en-US" altLang="ko-KR" sz="4000" b="1" dirty="0">
                 <a:solidFill>
                   <a:srgbClr val="1F2937"/>
                 </a:solidFill>
@@ -5958,7 +5958,7 @@
               <a:buNone/>
             </a:pPr>
             <a:r>
-              <a:rPr lang="ko-KR" altLang="en-US" sz="5900" b="1" dirty="0">
+              <a:rPr lang="en-US" altLang="ko-KR" sz="5900" b="1" dirty="0">
                 <a:solidFill>
                   <a:srgbClr val="1F2937"/>
                 </a:solidFill>
@@ -6005,7 +6005,7 @@
               <a:buNone/>
             </a:pPr>
             <a:r>
-              <a:rPr lang="ko-KR" altLang="en-US" sz="5900" b="1" dirty="0">
+              <a:rPr lang="en-US" altLang="ko-KR" sz="5900" b="1" dirty="0">
                 <a:solidFill>
                   <a:srgbClr val="1F2937"/>
                 </a:solidFill>
@@ -6052,7 +6052,7 @@
               <a:buNone/>
             </a:pPr>
             <a:r>
-              <a:rPr lang="ko-KR" altLang="en-US" sz="5900" b="1" dirty="0">
+              <a:rPr lang="en-US" altLang="ko-KR" sz="5900" b="1" dirty="0">
                 <a:solidFill>
                   <a:srgbClr val="1F2937"/>
                 </a:solidFill>
@@ -6146,7 +6146,7 @@
               <a:buNone/>
             </a:pPr>
             <a:r>
-              <a:rPr lang="ko-KR" altLang="en-US" sz="5900" b="1" dirty="0">
+              <a:rPr lang="en-US" altLang="ko-KR" sz="5900" b="1" dirty="0">
                 <a:solidFill>
                   <a:srgbClr val="1F2937"/>
                 </a:solidFill>
@@ -6193,7 +6193,7 @@
               <a:buNone/>
             </a:pPr>
             <a:r>
-              <a:rPr lang="ko-KR" altLang="en-US" sz="5900" b="1" dirty="0">
+              <a:rPr lang="en-US" altLang="ko-KR" sz="5900" b="1" dirty="0">
                 <a:solidFill>
                   <a:srgbClr val="1F2937"/>
                 </a:solidFill>
@@ -6240,7 +6240,7 @@
               <a:buNone/>
             </a:pPr>
             <a:r>
-              <a:rPr lang="ko-KR" altLang="en-US" sz="5900" b="1" dirty="0">
+              <a:rPr lang="en-US" altLang="ko-KR" sz="5900" b="1" dirty="0">
                 <a:solidFill>
                   <a:srgbClr val="1F2937"/>
                 </a:solidFill>
@@ -6334,7 +6334,7 @@
               <a:buNone/>
             </a:pPr>
             <a:r>
-              <a:rPr lang="ko-KR" altLang="en-US" sz="5900" b="1" dirty="0">
+              <a:rPr lang="en-US" altLang="ko-KR" sz="5900" b="1" dirty="0">
                 <a:solidFill>
                   <a:srgbClr val="1F2937"/>
                 </a:solidFill>
@@ -6428,7 +6428,7 @@
               <a:buNone/>
             </a:pPr>
             <a:r>
-              <a:rPr lang="ko-KR" altLang="en-US" sz="5900" b="1" dirty="0">
+              <a:rPr lang="en-US" altLang="ko-KR" sz="5900" b="1" dirty="0">
                 <a:solidFill>
                   <a:srgbClr val="1F2937"/>
                 </a:solidFill>
@@ -6522,7 +6522,7 @@
               <a:buNone/>
             </a:pPr>
             <a:r>
-              <a:rPr lang="ko-KR" altLang="en-US" sz="5900" b="1" dirty="0">
+              <a:rPr lang="en-US" altLang="ko-KR" sz="5900" b="1" dirty="0">
                 <a:solidFill>
                   <a:srgbClr val="1F2937"/>
                 </a:solidFill>
@@ -6569,7 +6569,7 @@
               <a:buNone/>
             </a:pPr>
             <a:r>
-              <a:rPr lang="ko-KR" altLang="en-US" sz="5900" b="1" dirty="0">
+              <a:rPr lang="en-US" altLang="ko-KR" sz="5900" b="1" dirty="0">
                 <a:solidFill>
                   <a:srgbClr val="1F2937"/>
                 </a:solidFill>
@@ -6616,7 +6616,7 @@
               <a:buNone/>
             </a:pPr>
             <a:r>
-              <a:rPr lang="ko-KR" altLang="en-US" sz="5900" b="1" dirty="0">
+              <a:rPr lang="en-US" altLang="ko-KR" sz="5900" b="1" dirty="0">
                 <a:solidFill>
                   <a:srgbClr val="1F2937"/>
                 </a:solidFill>
@@ -6885,7 +6885,7 @@
               <a:buNone/>
             </a:pPr>
             <a:r>
-              <a:rPr lang="ko-KR" altLang="en-US" sz="3000" dirty="0">
+              <a:rPr lang="en-US" altLang="ko-KR" sz="3000" dirty="0">
                 <a:solidFill>
                   <a:srgbClr val="1F2937"/>
                 </a:solidFill>
@@ -6902,7 +6902,7 @@
               <a:buNone/>
             </a:pPr>
             <a:r>
-              <a:rPr lang="ko-KR" altLang="en-US" sz="3000" dirty="0">
+              <a:rPr lang="en-US" altLang="ko-KR" sz="3000" dirty="0">
                 <a:solidFill>
                   <a:srgbClr val="1F2937"/>
                 </a:solidFill>
@@ -6980,7 +6980,7 @@
               <a:buNone/>
             </a:pPr>
             <a:r>
-              <a:rPr lang="ko-KR" altLang="en-US" sz="3000" dirty="0">
+              <a:rPr lang="en-US" altLang="ko-KR" sz="3000" dirty="0">
                 <a:solidFill>
                   <a:srgbClr val="1F2937"/>
                 </a:solidFill>
@@ -7058,7 +7058,7 @@
               <a:buNone/>
             </a:pPr>
             <a:r>
-              <a:rPr lang="ko-KR" altLang="en-US" sz="3000" dirty="0">
+              <a:rPr lang="en-US" altLang="ko-KR" sz="3000" dirty="0">
                 <a:solidFill>
                   <a:srgbClr val="1F2937"/>
                 </a:solidFill>
@@ -7655,7 +7655,7 @@
               <a:buNone/>
             </a:pPr>
             <a:r>
-              <a:rPr lang="ko-KR" altLang="en-US" sz="6300" b="1" dirty="0">
+              <a:rPr lang="en-US" altLang="ko-KR" sz="6300" b="1" dirty="0">
                 <a:solidFill>
                   <a:srgbClr val="1F2937"/>
                 </a:solidFill>
@@ -7749,7 +7749,7 @@
               <a:buNone/>
             </a:pPr>
             <a:r>
-              <a:rPr lang="ko-KR" altLang="en-US" sz="6300" b="1" dirty="0">
+              <a:rPr lang="en-US" altLang="ko-KR" sz="6300" b="1" dirty="0">
                 <a:solidFill>
                   <a:srgbClr val="1F2937"/>
                 </a:solidFill>
@@ -7843,7 +7843,7 @@
               <a:buNone/>
             </a:pPr>
             <a:r>
-              <a:rPr lang="ko-KR" altLang="en-US" sz="6300" b="1" dirty="0">
+              <a:rPr lang="en-US" altLang="ko-KR" sz="6300" b="1" dirty="0">
                 <a:solidFill>
                   <a:srgbClr val="1F2937"/>
                 </a:solidFill>
@@ -7937,7 +7937,7 @@
               <a:buNone/>
             </a:pPr>
             <a:r>
-              <a:rPr lang="ko-KR" altLang="en-US" sz="6300" b="1" dirty="0">
+              <a:rPr lang="en-US" altLang="ko-KR" sz="6300" b="1" dirty="0">
                 <a:solidFill>
                   <a:srgbClr val="1F2937"/>
                 </a:solidFill>
@@ -9731,7 +9731,7 @@
               <a:buNone/>
             </a:pPr>
             <a:r>
-              <a:rPr lang="ko-KR" altLang="en-US" sz="8700" b="1" dirty="0">
+              <a:rPr lang="en-US" altLang="ko-KR" sz="8700" b="1" dirty="0">
                 <a:solidFill>
                   <a:srgbClr val="1F2937"/>
                 </a:solidFill>
@@ -9778,7 +9778,7 @@
               <a:buNone/>
             </a:pPr>
             <a:r>
-              <a:rPr lang="ko-KR" altLang="en-US" sz="8700" b="1" dirty="0">
+              <a:rPr lang="en-US" altLang="ko-KR" sz="8700" b="1" dirty="0">
                 <a:solidFill>
                   <a:srgbClr val="1F2937"/>
                 </a:solidFill>
@@ -10077,7 +10077,7 @@
               <a:buNone/>
             </a:pPr>
             <a:r>
-              <a:rPr lang="ko-KR" altLang="en-US" sz="8700" b="1" dirty="0">
+              <a:rPr lang="en-US" altLang="ko-KR" sz="8700" b="1" dirty="0">
                 <a:solidFill>
                   <a:srgbClr val="1F2937"/>
                 </a:solidFill>
@@ -10124,7 +10124,7 @@
               <a:buNone/>
             </a:pPr>
             <a:r>
-              <a:rPr lang="ko-KR" altLang="en-US" sz="8700" b="1" dirty="0">
+              <a:rPr lang="en-US" altLang="ko-KR" sz="8700" b="1" dirty="0">
                 <a:solidFill>
                   <a:srgbClr val="1F2937"/>
                 </a:solidFill>
@@ -10423,7 +10423,7 @@
               <a:buNone/>
             </a:pPr>
             <a:r>
-              <a:rPr lang="ko-KR" altLang="en-US" sz="8700" b="1" dirty="0">
+              <a:rPr lang="en-US" altLang="ko-KR" sz="8700" b="1" dirty="0">
                 <a:solidFill>
                   <a:srgbClr val="1F2937"/>
                 </a:solidFill>
@@ -10470,7 +10470,7 @@
               <a:buNone/>
             </a:pPr>
             <a:r>
-              <a:rPr lang="ko-KR" altLang="en-US" sz="8700" b="1" dirty="0">
+              <a:rPr lang="en-US" altLang="ko-KR" sz="8700" b="1" dirty="0">
                 <a:solidFill>
                   <a:srgbClr val="1F2937"/>
                 </a:solidFill>
@@ -10769,7 +10769,7 @@
               <a:buNone/>
             </a:pPr>
             <a:r>
-              <a:rPr lang="ko-KR" altLang="en-US" sz="8700" b="1" dirty="0">
+              <a:rPr lang="en-US" altLang="ko-KR" sz="8700" b="1" dirty="0">
                 <a:solidFill>
                   <a:srgbClr val="1F2937"/>
                 </a:solidFill>
@@ -10816,7 +10816,7 @@
               <a:buNone/>
             </a:pPr>
             <a:r>
-              <a:rPr lang="ko-KR" altLang="en-US" sz="8700" b="1" dirty="0">
+              <a:rPr lang="en-US" altLang="ko-KR" sz="8700" b="1" dirty="0">
                 <a:solidFill>
                   <a:srgbClr val="1F2937"/>
                 </a:solidFill>
@@ -11184,7 +11184,7 @@
               <a:buNone/>
             </a:pPr>
             <a:r>
-              <a:rPr lang="ko-KR" altLang="en-US" sz="7900" b="1" dirty="0">
+              <a:rPr lang="en-US" altLang="ko-KR" sz="7900" b="1" dirty="0">
                 <a:solidFill>
                   <a:srgbClr val="1F2937"/>
                 </a:solidFill>
@@ -11231,7 +11231,7 @@
               <a:buNone/>
             </a:pPr>
             <a:r>
-              <a:rPr lang="ko-KR" altLang="en-US" sz="7900" b="1" dirty="0">
+              <a:rPr lang="en-US" altLang="ko-KR" sz="7900" b="1" dirty="0">
                 <a:solidFill>
                   <a:srgbClr val="1F2937"/>
                 </a:solidFill>
@@ -11599,7 +11599,7 @@
               <a:buNone/>
             </a:pPr>
             <a:r>
-              <a:rPr lang="ko-KR" altLang="en-US" sz="7900" b="1" dirty="0">
+              <a:rPr lang="en-US" altLang="ko-KR" sz="7900" b="1" dirty="0">
                 <a:solidFill>
                   <a:srgbClr val="1F2937"/>
                 </a:solidFill>
@@ -11646,7 +11646,7 @@
               <a:buNone/>
             </a:pPr>
             <a:r>
-              <a:rPr lang="ko-KR" altLang="en-US" sz="7900" b="1" dirty="0">
+              <a:rPr lang="en-US" altLang="ko-KR" sz="7900" b="1" dirty="0">
                 <a:solidFill>
                   <a:srgbClr val="1F2937"/>
                 </a:solidFill>
@@ -11915,7 +11915,7 @@
               <a:buNone/>
             </a:pPr>
             <a:r>
-              <a:rPr lang="ko-KR" altLang="en-US" sz="5900" b="1" dirty="0">
+              <a:rPr lang="en-US" altLang="ko-KR" sz="5900" b="1" dirty="0">
                 <a:solidFill>
                   <a:srgbClr val="1F2937"/>
                 </a:solidFill>
@@ -11962,7 +11962,7 @@
               <a:buNone/>
             </a:pPr>
             <a:r>
-              <a:rPr lang="ko-KR" altLang="en-US" sz="5900" b="1" dirty="0">
+              <a:rPr lang="en-US" altLang="ko-KR" sz="5900" b="1" dirty="0">
                 <a:solidFill>
                   <a:srgbClr val="1F2937"/>
                 </a:solidFill>
@@ -12009,7 +12009,7 @@
               <a:buNone/>
             </a:pPr>
             <a:r>
-              <a:rPr lang="ko-KR" altLang="en-US" sz="5900" b="1" dirty="0">
+              <a:rPr lang="en-US" altLang="ko-KR" sz="5900" b="1" dirty="0">
                 <a:solidFill>
                   <a:srgbClr val="1F2937"/>
                 </a:solidFill>
@@ -12056,7 +12056,7 @@
               <a:buNone/>
             </a:pPr>
             <a:r>
-              <a:rPr lang="ko-KR" altLang="en-US" sz="5900" b="1" dirty="0">
+              <a:rPr lang="en-US" altLang="ko-KR" sz="5900" b="1" dirty="0">
                 <a:solidFill>
                   <a:srgbClr val="1F2937"/>
                 </a:solidFill>
@@ -12103,7 +12103,7 @@
               <a:buNone/>
             </a:pPr>
             <a:r>
-              <a:rPr lang="ko-KR" altLang="en-US" sz="5900" b="1" dirty="0">
+              <a:rPr lang="en-US" altLang="ko-KR" sz="5900" b="1" dirty="0">
                 <a:solidFill>
                   <a:srgbClr val="1F2937"/>
                 </a:solidFill>
@@ -12150,7 +12150,7 @@
               <a:buNone/>
             </a:pPr>
             <a:r>
-              <a:rPr lang="ko-KR" altLang="en-US" sz="5900" b="1" dirty="0">
+              <a:rPr lang="en-US" altLang="ko-KR" sz="5900" b="1" dirty="0">
                 <a:solidFill>
                   <a:srgbClr val="1F2937"/>
                 </a:solidFill>
@@ -12197,7 +12197,7 @@
               <a:buNone/>
             </a:pPr>
             <a:r>
-              <a:rPr lang="ko-KR" altLang="en-US" sz="5900" b="1" dirty="0">
+              <a:rPr lang="en-US" altLang="ko-KR" sz="5900" b="1" dirty="0">
                 <a:solidFill>
                   <a:srgbClr val="1F2937"/>
                 </a:solidFill>
@@ -12244,7 +12244,7 @@
               <a:buNone/>
             </a:pPr>
             <a:r>
-              <a:rPr lang="ko-KR" altLang="en-US" sz="5900" b="1" dirty="0">
+              <a:rPr lang="en-US" altLang="ko-KR" sz="5900" b="1" dirty="0">
                 <a:solidFill>
                   <a:srgbClr val="1F2937"/>
                 </a:solidFill>
@@ -12291,7 +12291,7 @@
               <a:buNone/>
             </a:pPr>
             <a:r>
-              <a:rPr lang="ko-KR" altLang="en-US" sz="5900" b="1" dirty="0">
+              <a:rPr lang="en-US" altLang="ko-KR" sz="5900" b="1" dirty="0">
                 <a:solidFill>
                   <a:srgbClr val="1F2937"/>
                 </a:solidFill>
@@ -12338,7 +12338,7 @@
               <a:buNone/>
             </a:pPr>
             <a:r>
-              <a:rPr lang="ko-KR" altLang="en-US" sz="5900" b="1" dirty="0">
+              <a:rPr lang="en-US" altLang="ko-KR" sz="5900" b="1" dirty="0">
                 <a:solidFill>
                   <a:srgbClr val="1F2937"/>
                 </a:solidFill>
@@ -12385,7 +12385,7 @@
               <a:buNone/>
             </a:pPr>
             <a:r>
-              <a:rPr lang="ko-KR" altLang="en-US" sz="5900" b="1" dirty="0">
+              <a:rPr lang="en-US" altLang="ko-KR" sz="5900" b="1" dirty="0">
                 <a:solidFill>
                   <a:srgbClr val="1F2937"/>
                 </a:solidFill>
@@ -12432,7 +12432,7 @@
               <a:buNone/>
             </a:pPr>
             <a:r>
-              <a:rPr lang="ko-KR" altLang="en-US" sz="5900" b="1" dirty="0">
+              <a:rPr lang="en-US" altLang="ko-KR" sz="5900" b="1" dirty="0">
                 <a:solidFill>
                   <a:srgbClr val="1F2937"/>
                 </a:solidFill>
@@ -12479,7 +12479,7 @@
               <a:buNone/>
             </a:pPr>
             <a:r>
-              <a:rPr lang="ko-KR" altLang="en-US" sz="5900" b="1" dirty="0">
+              <a:rPr lang="en-US" altLang="ko-KR" sz="5900" b="1" dirty="0">
                 <a:solidFill>
                   <a:srgbClr val="1F2937"/>
                 </a:solidFill>

--- a/dist/초3/영어/소리와문자/초3_영어_소리와문자_01_알파벳A부터M까지.pptx
+++ b/dist/초3/영어/소리와문자/초3_영어_소리와문자_01_알파벳A부터M까지.pptx
@@ -123,13 +123,13 @@
   <p:extLst>
     <p:ext uri="{521415D9-36F7-43E2-AB2F-B90AF26B5E84}">
       <p14:sectionLst xmlns:p14="http://schemas.microsoft.com/office/powerpoint/2010/main">
-        <p14:section name="도입" id="{ff69ef34-8790-4b89-4d65-552af405065c}">
+        <p14:section name="도입" id="{e2dadaa2-5d7c-e192-6da4-82faee08a6ac}">
           <p14:sldIdLst>
             <p14:sldId id="256"/>
             <p14:sldId id="257"/>
           </p14:sldIdLst>
         </p14:section>
-        <p14:section name="개념" id="{d5dfc840-f831-89c2-9a68-478b46e939e0}">
+        <p14:section name="개념" id="{bece7ac5-5b12-ff6e-da79-d1d58cbfca12}">
           <p14:sldIdLst>
             <p14:sldId id="258"/>
             <p14:sldId id="259"/>
@@ -140,26 +140,26 @@
             <p14:sldId id="264"/>
           </p14:sldIdLst>
         </p14:section>
-        <p14:section name="연습" id="{407cab2d-8d79-3642-161c-caae61d15feb}">
+        <p14:section name="연습" id="{0d30589f-ab59-c43d-2b71-af811510418b}">
           <p14:sldIdLst>
             <p14:sldId id="265"/>
             <p14:sldId id="266"/>
             <p14:sldId id="267"/>
           </p14:sldIdLst>
         </p14:section>
-        <p14:section name="확인" id="{3bad1634-93a0-f494-f7be-dfcd048fe44f}">
+        <p14:section name="확인" id="{6c627891-3e90-8888-8489-8c727fe98b89}">
           <p14:sldIdLst>
             <p14:sldId id="268"/>
             <p14:sldId id="269"/>
             <p14:sldId id="270"/>
           </p14:sldIdLst>
         </p14:section>
-        <p14:section name="정리" id="{42baf4ca-402a-1df3-20a2-b92ecaaac8ef}">
+        <p14:section name="정리" id="{6bdd6517-ed9a-6b67-36c1-6939ce766e1b}">
           <p14:sldIdLst>
             <p14:sldId id="271"/>
           </p14:sldIdLst>
         </p14:section>
-        <p14:section name="보충" id="{b556a273-2676-2b7b-8932-062b9672b304}">
+        <p14:section name="보충" id="{d7448523-58e4-4822-c650-fc4c644b64bf}">
           <p14:sldIdLst>
             <p14:sldId id="272"/>
           </p14:sldIdLst>

--- a/dist/초3/영어/소리와문자/초3_영어_소리와문자_01_알파벳A부터M까지.pptx
+++ b/dist/초3/영어/소리와문자/초3_영어_소리와문자_01_알파벳A부터M까지.pptx
@@ -123,13 +123,13 @@
   <p:extLst>
     <p:ext uri="{521415D9-36F7-43E2-AB2F-B90AF26B5E84}">
       <p14:sectionLst xmlns:p14="http://schemas.microsoft.com/office/powerpoint/2010/main">
-        <p14:section name="도입" id="{e2dadaa2-5d7c-e192-6da4-82faee08a6ac}">
+        <p14:section name="도입" id="{4f19709d-2491-8808-4589-f13399d43723}">
           <p14:sldIdLst>
             <p14:sldId id="256"/>
             <p14:sldId id="257"/>
           </p14:sldIdLst>
         </p14:section>
-        <p14:section name="개념" id="{bece7ac5-5b12-ff6e-da79-d1d58cbfca12}">
+        <p14:section name="개념" id="{7c1a0a8e-8df0-e804-5dea-02e6450d1149}">
           <p14:sldIdLst>
             <p14:sldId id="258"/>
             <p14:sldId id="259"/>
@@ -140,26 +140,26 @@
             <p14:sldId id="264"/>
           </p14:sldIdLst>
         </p14:section>
-        <p14:section name="연습" id="{0d30589f-ab59-c43d-2b71-af811510418b}">
+        <p14:section name="연습" id="{c1741038-a033-5220-dc21-8a8538737853}">
           <p14:sldIdLst>
             <p14:sldId id="265"/>
             <p14:sldId id="266"/>
             <p14:sldId id="267"/>
           </p14:sldIdLst>
         </p14:section>
-        <p14:section name="확인" id="{6c627891-3e90-8888-8489-8c727fe98b89}">
+        <p14:section name="확인" id="{315dad89-0242-05a4-90c1-833ec6c9395f}">
           <p14:sldIdLst>
             <p14:sldId id="268"/>
             <p14:sldId id="269"/>
             <p14:sldId id="270"/>
           </p14:sldIdLst>
         </p14:section>
-        <p14:section name="정리" id="{6bdd6517-ed9a-6b67-36c1-6939ce766e1b}">
+        <p14:section name="정리" id="{723d8247-b51b-ae2f-1b3d-e6dba2b95bc6}">
           <p14:sldIdLst>
             <p14:sldId id="271"/>
           </p14:sldIdLst>
         </p14:section>
-        <p14:section name="보충" id="{d7448523-58e4-4822-c650-fc4c644b64bf}">
+        <p14:section name="보충" id="{3f215d7f-11fe-eec5-42fc-e4138a14e394}">
           <p14:sldIdLst>
             <p14:sldId id="272"/>
           </p14:sldIdLst>
